--- a/PDF_MultiModal_Analysis_Deck.pptx
+++ b/PDF_MultiModal_Analysis_Deck.pptx
@@ -313,7 +313,7 @@
           <a:p>
             <a:fld id="{5BCAD085-E8A6-8845-BD4E-CB4CCA059FC4}" type="datetimeFigureOut">
               <a:rPr lang="en-US" smtClean="0"/>
-              <a:t>3/3/2026</a:t>
+              <a:t>3/6/2026</a:t>
             </a:fld>
             <a:endParaRPr lang="en-US"/>
           </a:p>
@@ -481,7 +481,7 @@
           <a:p>
             <a:fld id="{5BCAD085-E8A6-8845-BD4E-CB4CCA059FC4}" type="datetimeFigureOut">
               <a:rPr lang="en-US" smtClean="0"/>
-              <a:t>3/3/2026</a:t>
+              <a:t>3/6/2026</a:t>
             </a:fld>
             <a:endParaRPr lang="en-US"/>
           </a:p>
@@ -659,7 +659,7 @@
           <a:p>
             <a:fld id="{5BCAD085-E8A6-8845-BD4E-CB4CCA059FC4}" type="datetimeFigureOut">
               <a:rPr lang="en-US" smtClean="0"/>
-              <a:t>3/3/2026</a:t>
+              <a:t>3/6/2026</a:t>
             </a:fld>
             <a:endParaRPr lang="en-US"/>
           </a:p>
@@ -827,7 +827,7 @@
           <a:p>
             <a:fld id="{5BCAD085-E8A6-8845-BD4E-CB4CCA059FC4}" type="datetimeFigureOut">
               <a:rPr lang="en-US" smtClean="0"/>
-              <a:t>3/3/2026</a:t>
+              <a:t>3/6/2026</a:t>
             </a:fld>
             <a:endParaRPr lang="en-US"/>
           </a:p>
@@ -1072,7 +1072,7 @@
           <a:p>
             <a:fld id="{5BCAD085-E8A6-8845-BD4E-CB4CCA059FC4}" type="datetimeFigureOut">
               <a:rPr lang="en-US" smtClean="0"/>
-              <a:t>3/3/2026</a:t>
+              <a:t>3/6/2026</a:t>
             </a:fld>
             <a:endParaRPr lang="en-US"/>
           </a:p>
@@ -1357,7 +1357,7 @@
           <a:p>
             <a:fld id="{5BCAD085-E8A6-8845-BD4E-CB4CCA059FC4}" type="datetimeFigureOut">
               <a:rPr lang="en-US" smtClean="0"/>
-              <a:t>3/3/2026</a:t>
+              <a:t>3/6/2026</a:t>
             </a:fld>
             <a:endParaRPr lang="en-US"/>
           </a:p>
@@ -1776,7 +1776,7 @@
           <a:p>
             <a:fld id="{5BCAD085-E8A6-8845-BD4E-CB4CCA059FC4}" type="datetimeFigureOut">
               <a:rPr lang="en-US" smtClean="0"/>
-              <a:t>3/3/2026</a:t>
+              <a:t>3/6/2026</a:t>
             </a:fld>
             <a:endParaRPr lang="en-US"/>
           </a:p>
@@ -1893,7 +1893,7 @@
           <a:p>
             <a:fld id="{5BCAD085-E8A6-8845-BD4E-CB4CCA059FC4}" type="datetimeFigureOut">
               <a:rPr lang="en-US" smtClean="0"/>
-              <a:t>3/3/2026</a:t>
+              <a:t>3/6/2026</a:t>
             </a:fld>
             <a:endParaRPr lang="en-US"/>
           </a:p>
@@ -1988,7 +1988,7 @@
           <a:p>
             <a:fld id="{5BCAD085-E8A6-8845-BD4E-CB4CCA059FC4}" type="datetimeFigureOut">
               <a:rPr lang="en-US" smtClean="0"/>
-              <a:t>3/3/2026</a:t>
+              <a:t>3/6/2026</a:t>
             </a:fld>
             <a:endParaRPr lang="en-US"/>
           </a:p>
@@ -2263,7 +2263,7 @@
           <a:p>
             <a:fld id="{5BCAD085-E8A6-8845-BD4E-CB4CCA059FC4}" type="datetimeFigureOut">
               <a:rPr lang="en-US" smtClean="0"/>
-              <a:t>3/3/2026</a:t>
+              <a:t>3/6/2026</a:t>
             </a:fld>
             <a:endParaRPr lang="en-US"/>
           </a:p>
@@ -2515,7 +2515,7 @@
           <a:p>
             <a:fld id="{5BCAD085-E8A6-8845-BD4E-CB4CCA059FC4}" type="datetimeFigureOut">
               <a:rPr lang="en-US" smtClean="0"/>
-              <a:t>3/3/2026</a:t>
+              <a:t>3/6/2026</a:t>
             </a:fld>
             <a:endParaRPr lang="en-US"/>
           </a:p>
@@ -2726,7 +2726,7 @@
           <a:p>
             <a:fld id="{5BCAD085-E8A6-8845-BD4E-CB4CCA059FC4}" type="datetimeFigureOut">
               <a:rPr lang="en-US" smtClean="0"/>
-              <a:t>3/3/2026</a:t>
+              <a:t>3/6/2026</a:t>
             </a:fld>
             <a:endParaRPr lang="en-US"/>
           </a:p>
@@ -4224,6 +4224,36 @@
           </a:prstGeom>
         </p:spPr>
       </p:pic>
+      <p:pic>
+        <p:nvPicPr>
+          <p:cNvPr id="5" name="Picture 4">
+            <a:extLst>
+              <a:ext uri="{FF2B5EF4-FFF2-40B4-BE49-F238E27FC236}">
+                <a16:creationId xmlns:a16="http://schemas.microsoft.com/office/drawing/2014/main" id="{DF64C7D6-5CC4-544B-78A0-97E02E855549}"/>
+              </a:ext>
+            </a:extLst>
+          </p:cNvPr>
+          <p:cNvPicPr>
+            <a:picLocks noChangeAspect="1"/>
+          </p:cNvPicPr>
+          <p:nvPr/>
+        </p:nvPicPr>
+        <p:blipFill>
+          <a:blip r:embed="rId4"/>
+          <a:stretch>
+            <a:fillRect/>
+          </a:stretch>
+        </p:blipFill>
+        <p:spPr>
+          <a:xfrm>
+            <a:off x="6184889" y="4274559"/>
+            <a:ext cx="5595043" cy="1789112"/>
+          </a:xfrm>
+          <a:prstGeom prst="rect">
+            <a:avLst/>
+          </a:prstGeom>
+        </p:spPr>
+      </p:pic>
     </p:spTree>
     <p:extLst>
       <p:ext uri="{BB962C8B-B14F-4D97-AF65-F5344CB8AC3E}">
@@ -4254,6 +4284,226 @@
           <a:chExt cx="0" cy="0"/>
         </a:xfrm>
       </p:grpSpPr>
+      <p:sp>
+        <p:nvSpPr>
+          <p:cNvPr id="2" name="TextBox 1">
+            <a:extLst>
+              <a:ext uri="{FF2B5EF4-FFF2-40B4-BE49-F238E27FC236}">
+                <a16:creationId xmlns:a16="http://schemas.microsoft.com/office/drawing/2014/main" id="{B4393531-D570-77AD-B23F-6445AC605CDD}"/>
+              </a:ext>
+            </a:extLst>
+          </p:cNvPr>
+          <p:cNvSpPr txBox="1"/>
+          <p:nvPr/>
+        </p:nvSpPr>
+        <p:spPr>
+          <a:xfrm>
+            <a:off x="1496291" y="1560945"/>
+            <a:ext cx="8950036" cy="4801314"/>
+          </a:xfrm>
+          <a:prstGeom prst="rect">
+            <a:avLst/>
+          </a:prstGeom>
+          <a:noFill/>
+        </p:spPr>
+        <p:txBody>
+          <a:bodyPr wrap="square" rtlCol="0">
+            <a:spAutoFit/>
+          </a:bodyPr>
+          <a:lstStyle/>
+          <a:p>
+            <a:pPr marL="342900" indent="-342900">
+              <a:buAutoNum type="arabicPeriod"/>
+            </a:pPr>
+            <a:r>
+              <a:rPr lang="en-US" dirty="0"/>
+              <a:t>Unstructured data as knowledge source (SPO - Dataverse) – March 9</a:t>
+            </a:r>
+          </a:p>
+          <a:p>
+            <a:pPr marL="800100" lvl="1" indent="-342900">
+              <a:buAutoNum type="arabicPeriod"/>
+            </a:pPr>
+            <a:r>
+              <a:rPr lang="en-US" dirty="0"/>
+              <a:t>We can try this today!</a:t>
+            </a:r>
+          </a:p>
+          <a:p>
+            <a:pPr marL="800100" lvl="1" indent="-342900">
+              <a:buAutoNum type="arabicPeriod"/>
+            </a:pPr>
+            <a:r>
+              <a:rPr lang="en-US" dirty="0"/>
+              <a:t>Owner: CVS</a:t>
+            </a:r>
+          </a:p>
+          <a:p>
+            <a:pPr marL="800100" lvl="1" indent="-342900">
+              <a:buFontTx/>
+              <a:buAutoNum type="arabicPeriod"/>
+            </a:pPr>
+            <a:r>
+              <a:rPr lang="en-US" dirty="0"/>
+              <a:t>Advisory: MSFT</a:t>
+            </a:r>
+          </a:p>
+          <a:p>
+            <a:pPr marL="800100" lvl="1" indent="-342900">
+              <a:buFontTx/>
+              <a:buAutoNum type="arabicPeriod"/>
+            </a:pPr>
+            <a:r>
+              <a:rPr lang="en-US" dirty="0"/>
+              <a:t>Exit criteria: </a:t>
+            </a:r>
+          </a:p>
+          <a:p>
+            <a:pPr lvl="1"/>
+            <a:endParaRPr lang="en-US" dirty="0"/>
+          </a:p>
+          <a:p>
+            <a:pPr marL="342900" indent="-342900">
+              <a:buAutoNum type="arabicPeriod"/>
+            </a:pPr>
+            <a:r>
+              <a:rPr lang="en-US" dirty="0"/>
+              <a:t>Azure DI + GPT 5.2 Vision </a:t>
+            </a:r>
+          </a:p>
+          <a:p>
+            <a:pPr marL="800100" lvl="1" indent="-342900">
+              <a:buAutoNum type="arabicPeriod"/>
+            </a:pPr>
+            <a:r>
+              <a:rPr lang="en-US" dirty="0"/>
+              <a:t>Owner: CVS</a:t>
+            </a:r>
+          </a:p>
+          <a:p>
+            <a:pPr marL="800100" lvl="1" indent="-342900">
+              <a:buAutoNum type="arabicPeriod"/>
+            </a:pPr>
+            <a:r>
+              <a:rPr lang="en-US" dirty="0"/>
+              <a:t>Advisory: MSFT</a:t>
+            </a:r>
+          </a:p>
+          <a:p>
+            <a:pPr marL="800100" lvl="1" indent="-342900">
+              <a:buAutoNum type="arabicPeriod"/>
+            </a:pPr>
+            <a:r>
+              <a:rPr lang="en-US" dirty="0"/>
+              <a:t>[Option 1] Markdown file store in SPO and use as knowledge with AI Prompt Builder</a:t>
+            </a:r>
+          </a:p>
+          <a:p>
+            <a:pPr marL="800100" lvl="1" indent="-342900">
+              <a:buFontTx/>
+              <a:buAutoNum type="arabicPeriod"/>
+            </a:pPr>
+            <a:r>
+              <a:rPr lang="en-US" dirty="0"/>
+              <a:t>[Option 2] Azure AI Search + Vector DB</a:t>
+            </a:r>
+          </a:p>
+          <a:p>
+            <a:pPr marL="800100" lvl="1" indent="-342900">
+              <a:buFontTx/>
+              <a:buAutoNum type="arabicPeriod"/>
+            </a:pPr>
+            <a:endParaRPr lang="en-US" dirty="0"/>
+          </a:p>
+          <a:p>
+            <a:pPr marL="342900" indent="-342900">
+              <a:buAutoNum type="arabicPeriod"/>
+            </a:pPr>
+            <a:r>
+              <a:rPr lang="en-US" dirty="0"/>
+              <a:t>SPO + Chunking + </a:t>
+            </a:r>
+            <a:r>
+              <a:rPr lang="en-US" dirty="0" err="1"/>
+              <a:t>GenAnswers</a:t>
+            </a:r>
+            <a:r>
+              <a:rPr lang="en-US" dirty="0"/>
+              <a:t> </a:t>
+            </a:r>
+          </a:p>
+          <a:p>
+            <a:pPr marL="800100" lvl="1" indent="-342900">
+              <a:buAutoNum type="arabicPeriod"/>
+            </a:pPr>
+            <a:r>
+              <a:rPr lang="en-US" dirty="0"/>
+              <a:t>Owner: CVS</a:t>
+            </a:r>
+          </a:p>
+          <a:p>
+            <a:pPr marL="800100" lvl="1" indent="-342900">
+              <a:buFontTx/>
+              <a:buAutoNum type="arabicPeriod"/>
+            </a:pPr>
+            <a:r>
+              <a:rPr lang="en-US" dirty="0"/>
+              <a:t>Advisory: MSFT</a:t>
+            </a:r>
+          </a:p>
+          <a:p>
+            <a:pPr marL="1257300" lvl="2" indent="-342900">
+              <a:buFontTx/>
+              <a:buAutoNum type="arabicPeriod"/>
+            </a:pPr>
+            <a:r>
+              <a:rPr lang="en-US" dirty="0"/>
+              <a:t>MSFT to share Azure Function/Py Code Samples</a:t>
+            </a:r>
+          </a:p>
+          <a:p>
+            <a:pPr marL="342900" indent="-342900">
+              <a:buAutoNum type="arabicPeriod"/>
+            </a:pPr>
+            <a:endParaRPr lang="en-US" dirty="0"/>
+          </a:p>
+        </p:txBody>
+      </p:sp>
+      <p:sp>
+        <p:nvSpPr>
+          <p:cNvPr id="3" name="TextBox 2">
+            <a:extLst>
+              <a:ext uri="{FF2B5EF4-FFF2-40B4-BE49-F238E27FC236}">
+                <a16:creationId xmlns:a16="http://schemas.microsoft.com/office/drawing/2014/main" id="{F60A0D0A-DBCF-AB6C-55E6-8B66089CD703}"/>
+              </a:ext>
+            </a:extLst>
+          </p:cNvPr>
+          <p:cNvSpPr txBox="1"/>
+          <p:nvPr/>
+        </p:nvSpPr>
+        <p:spPr>
+          <a:xfrm>
+            <a:off x="1496291" y="588074"/>
+            <a:ext cx="8211127" cy="646331"/>
+          </a:xfrm>
+          <a:prstGeom prst="rect">
+            <a:avLst/>
+          </a:prstGeom>
+          <a:noFill/>
+        </p:spPr>
+        <p:txBody>
+          <a:bodyPr wrap="square" rtlCol="0">
+            <a:spAutoFit/>
+          </a:bodyPr>
+          <a:lstStyle/>
+          <a:p>
+            <a:r>
+              <a:rPr lang="en-US" sz="3600" dirty="0"/>
+              <a:t>Game Plan – SydnyxV2</a:t>
+            </a:r>
+          </a:p>
+        </p:txBody>
+      </p:sp>
     </p:spTree>
     <p:extLst>
       <p:ext uri="{BB962C8B-B14F-4D97-AF65-F5344CB8AC3E}">
@@ -4927,7 +5177,7 @@
         <p:spPr>
           <a:xfrm>
             <a:off x="6903720" y="1618488"/>
-            <a:ext cx="4114800" cy="4098558"/>
+            <a:ext cx="4191000" cy="3790781"/>
           </a:xfrm>
           <a:prstGeom prst="rect">
             <a:avLst/>
